--- a/docs/G9-IPTS_Demo_Walkthrough.pptx
+++ b/docs/G9-IPTS_Demo_Walkthrough.pptx
@@ -16795,7 +16795,7 @@
                   <a:srgbClr val="FFFFFF"/>
                 </a:solidFill>
               </a:rPr>
-              <a:t>After IPTS v4.0</a:t>
+              <a:t>After IPTS v5.0</a:t>
             </a:r>
             <a:endParaRPr lang="en-US" sz="1300" dirty="0"/>
           </a:p>
